--- a/Lectures/EthicsOverview.pptx
+++ b/Lectures/EthicsOverview.pptx
@@ -262,7 +262,7 @@
       <p15:sldGuideLst xmlns:p15="http://schemas.microsoft.com/office/powerpoint/2012/main"/>
     </p:ext>
     <p:ext uri="http://customooxmlschemas.google.com/">
-      <go:slidesCustomData xmlns:go="http://customooxmlschemas.google.com/" xmlns:p15="http://schemas.microsoft.com/office/powerpoint/2012/main" xmlns:p14="http://schemas.microsoft.com/office/powerpoint/2010/main" xmlns:com="http://schemas.openxmlformats.org/drawingml/2006/compatibility" xmlns:pvml="urn:schemas-microsoft-com:office:powerpoint" xmlns:v="urn:schemas-microsoft-com:vml" xmlns:o="urn:schemas-microsoft-com:office:office" xmlns:dgm="http://schemas.openxmlformats.org/drawingml/2006/diagram" xmlns:c="http://schemas.openxmlformats.org/drawingml/2006/chart" xmlns:mv="urn:schemas-microsoft-com:mac:vml" xmlns:mc="http://schemas.openxmlformats.org/markup-compatibility/2006" xmlns="" r:id="rId65" roundtripDataSignature="AMtx7miaBNfqHTds3AtKFboosNv4pOAy4g=="/>
+      <go:slidesCustomData xmlns="" xmlns:mc="http://schemas.openxmlformats.org/markup-compatibility/2006" xmlns:mv="urn:schemas-microsoft-com:mac:vml" xmlns:c="http://schemas.openxmlformats.org/drawingml/2006/chart" xmlns:dgm="http://schemas.openxmlformats.org/drawingml/2006/diagram" xmlns:o="urn:schemas-microsoft-com:office:office" xmlns:v="urn:schemas-microsoft-com:vml" xmlns:pvml="urn:schemas-microsoft-com:office:powerpoint" xmlns:com="http://schemas.openxmlformats.org/drawingml/2006/compatibility" xmlns:p14="http://schemas.microsoft.com/office/powerpoint/2010/main" xmlns:p15="http://schemas.microsoft.com/office/powerpoint/2012/main" xmlns:go="http://customooxmlschemas.google.com/" r:id="rId65" roundtripDataSignature="AMtx7miaBNfqHTds3AtKFboosNv4pOAy4g=="/>
     </p:ext>
   </p:extLst>
 </p:presentation>
@@ -12152,17 +12152,17 @@
           </a:ln>
           <a:extLst>
             <a:ext uri="{FAA26D3D-D897-4be2-8F04-BA451C77F1D7}">
-              <ma14:placeholderFlag xmlns:ma14="http://schemas.microsoft.com/office/mac/drawingml/2011/main" xmlns="" val="1"/>
+              <ma14:placeholderFlag xmlns="" xmlns:ma14="http://schemas.microsoft.com/office/mac/drawingml/2011/main" val="1"/>
             </a:ext>
             <a:ext uri="{909E8E84-426E-40dd-AFC4-6F175D3DCCD1}">
-              <a14:hiddenFill xmlns:a14="http://schemas.microsoft.com/office/drawing/2010/main" xmlns="">
+              <a14:hiddenFill xmlns="" xmlns:a14="http://schemas.microsoft.com/office/drawing/2010/main">
                 <a:solidFill>
                   <a:srgbClr val="FFFFFF"/>
                 </a:solidFill>
               </a14:hiddenFill>
             </a:ext>
             <a:ext uri="{91240B29-F687-4f45-9708-019B960494DF}">
-              <a14:hiddenLine xmlns:a14="http://schemas.microsoft.com/office/drawing/2010/main" xmlns="" w="9525">
+              <a14:hiddenLine xmlns="" xmlns:a14="http://schemas.microsoft.com/office/drawing/2010/main" w="9525">
                 <a:solidFill>
                   <a:srgbClr val="000000"/>
                 </a:solidFill>
@@ -12213,17 +12213,17 @@
           </a:ln>
           <a:extLst>
             <a:ext uri="{FAA26D3D-D897-4be2-8F04-BA451C77F1D7}">
-              <ma14:placeholderFlag xmlns:ma14="http://schemas.microsoft.com/office/mac/drawingml/2011/main" xmlns="" val="1"/>
+              <ma14:placeholderFlag xmlns="" xmlns:ma14="http://schemas.microsoft.com/office/mac/drawingml/2011/main" val="1"/>
             </a:ext>
             <a:ext uri="{909E8E84-426E-40dd-AFC4-6F175D3DCCD1}">
-              <a14:hiddenFill xmlns:a14="http://schemas.microsoft.com/office/drawing/2010/main" xmlns="">
+              <a14:hiddenFill xmlns="" xmlns:a14="http://schemas.microsoft.com/office/drawing/2010/main">
                 <a:solidFill>
                   <a:srgbClr val="FFFFFF"/>
                 </a:solidFill>
               </a14:hiddenFill>
             </a:ext>
             <a:ext uri="{91240B29-F687-4f45-9708-019B960494DF}">
-              <a14:hiddenLine xmlns:a14="http://schemas.microsoft.com/office/drawing/2010/main" xmlns="" w="9525">
+              <a14:hiddenLine xmlns="" xmlns:a14="http://schemas.microsoft.com/office/drawing/2010/main" w="9525">
                 <a:solidFill>
                   <a:srgbClr val="000000"/>
                 </a:solidFill>
@@ -13882,6 +13882,76 @@
         <p:txBody>
           <a:bodyPr/>
           <a:lstStyle/>
+          <a:p>
+            <a:r>
+              <a:rPr lang="en-US" dirty="0"/>
+              <a:t>  Understanding Models Assignment due next week</a:t>
+            </a:r>
+          </a:p>
+          <a:p>
+            <a:pPr lvl="1"/>
+            <a:r>
+              <a:rPr lang="en-US" dirty="0"/>
+              <a:t>Use the </a:t>
+            </a:r>
+            <a:r>
+              <a:rPr lang="en-US" dirty="0" err="1"/>
+              <a:t>train_results.feature_importances</a:t>
+            </a:r>
+            <a:r>
+              <a:rPr lang="en-US" dirty="0"/>
+              <a:t> table </a:t>
+            </a:r>
+          </a:p>
+          <a:p>
+            <a:pPr lvl="1"/>
+            <a:r>
+              <a:rPr lang="en-US" dirty="0"/>
+              <a:t>Use the </a:t>
+            </a:r>
+            <a:r>
+              <a:rPr lang="en-US" dirty="0">
+                <a:hlinkClick r:id="rId2"/>
+              </a:rPr>
+              <a:t>sample notebook </a:t>
+            </a:r>
+            <a:r>
+              <a:rPr lang="en-US" dirty="0"/>
+              <a:t>or </a:t>
+            </a:r>
+            <a:r>
+              <a:rPr lang="en-US" dirty="0">
+                <a:hlinkClick r:id="rId3"/>
+              </a:rPr>
+              <a:t>cookbook</a:t>
+            </a:r>
+            <a:r>
+              <a:rPr lang="en-US" dirty="0"/>
+              <a:t> to do crosstabs</a:t>
+            </a:r>
+            <a:br>
+              <a:rPr lang="en-US" dirty="0"/>
+            </a:br>
+            <a:endParaRPr lang="en-US" dirty="0"/>
+          </a:p>
+          <a:p>
+            <a:r>
+              <a:rPr lang="en-US" dirty="0"/>
+              <a:t>Focus on adding/fixing features and expanding the modeling grid this week(end) </a:t>
+            </a:r>
+          </a:p>
+          <a:p>
+            <a:endParaRPr lang="en-US" dirty="0"/>
+          </a:p>
+          <a:p>
+            <a:endParaRPr lang="en-US" dirty="0"/>
+          </a:p>
+          <a:p>
+            <a:endParaRPr lang="en-US" dirty="0"/>
+          </a:p>
+          <a:p>
+            <a:endParaRPr lang="en-US" dirty="0"/>
+          </a:p>
           <a:p>
             <a:pPr marL="76200" indent="0">
               <a:buNone/>
